--- a/slide/pptx/P05-Waktu-dan-Interupsi.pptx
+++ b/slide/pptx/P05-Waktu-dan-Interupsi.pptx
@@ -131,14 +131,14 @@
   <p:extLst>
     <p:ext uri="{521415D9-36F7-43E2-AB2F-B90AF26B5E84}">
       <p14:sectionLst xmlns:p14="http://schemas.microsoft.com/office/powerpoint/2010/main">
-        <p14:section name="Pembuka" id="{357ebed3-3184-cae1-2c7b-49eda6d6689c}">
+        <p14:section name="Pembuka" id="{0e36a553-d04b-edeb-fb58-6f0b06f2ab61}">
           <p14:sldIdLst>
             <p14:sldId id="256"/>
             <p14:sldId id="257"/>
             <p14:sldId id="258"/>
           </p14:sldIdLst>
         </p14:section>
-        <p14:section name="Waktu" id="{56fbe78f-d1e6-5669-c172-5dbe1ff468e1}">
+        <p14:section name="Waktu" id="{cffd88da-c16b-75d3-0199-4592f552b1c2}">
           <p14:sldIdLst>
             <p14:sldId id="259"/>
             <p14:sldId id="260"/>
@@ -147,7 +147,7 @@
             <p14:sldId id="263"/>
           </p14:sldIdLst>
         </p14:section>
-        <p14:section name="Interupsi" id="{1055ce87-beec-ba48-bb06-835989fd0bda}">
+        <p14:section name="Interupsi" id="{7edd8d9d-4715-aa0d-f926-eaba8fe67fa9}">
           <p14:sldIdLst>
             <p14:sldId id="264"/>
             <p14:sldId id="265"/>
@@ -158,7 +158,7 @@
             <p14:sldId id="270"/>
           </p14:sldIdLst>
         </p14:section>
-        <p14:section name="Timer" id="{a42ad52f-2972-0913-9a2e-430426aa46fd}">
+        <p14:section name="Timer" id="{396ea5d7-609e-738e-0b3e-52b51628307a}">
           <p14:sldIdLst>
             <p14:sldId id="271"/>
             <p14:sldId id="272"/>
@@ -170,7 +170,7 @@
             <p14:sldId id="278"/>
           </p14:sldIdLst>
         </p14:section>
-        <p14:section name="Penutup" id="{0188f455-dc83-603a-0c4a-847f6dd815f6}">
+        <p14:section name="Penutup" id="{3bff45cf-c29d-9f03-b910-936b8551a507}">
           <p14:sldIdLst>
             <p14:sldId id="279"/>
             <p14:sldId id="280"/>
@@ -6151,12 +6151,39 @@
             <a:r>
               <a:rPr lang="en-US" sz="1700" dirty="0">
                 <a:solidFill>
+                  <a:schemeClr val="tx1"/>
+                </a:solidFill>
+              </a:rPr>
+              <a:t>Untuk </a:t>
+            </a:r>
+            <a:r>
+              <a:rPr lang="en-US" sz="1700" dirty="0">
+                <a:solidFill>
                   <a:srgbClr val="A35F14"/>
                 </a:solidFill>
                 <a:latin typeface="Consolas" pitchFamily="34" charset="0"/>
                 <a:ea typeface="Consolas" pitchFamily="34" charset="-122"/>
                 <a:cs typeface="Consolas" pitchFamily="34" charset="-120"/>
               </a:rPr>
+              <a:t>volatile</a:t>
+            </a:r>
+            <a:r>
+              <a:rPr lang="en-US" sz="1700" dirty="0">
+                <a:solidFill>
+                  <a:schemeClr val="tx1"/>
+                </a:solidFill>
+              </a:rPr>
+              <a:t>, tulis </a:t>
+            </a:r>
+            <a:r>
+              <a:rPr lang="en-US" sz="1700" dirty="0">
+                <a:solidFill>
+                  <a:srgbClr val="A35F14"/>
+                </a:solidFill>
+                <a:latin typeface="Consolas" pitchFamily="34" charset="0"/>
+                <a:ea typeface="Consolas" pitchFamily="34" charset="-122"/>
+                <a:cs typeface="Consolas" pitchFamily="34" charset="-120"/>
+              </a:rPr>
               <a:t>x = x + 1</a:t>
             </a:r>
             <a:r>
@@ -6165,7 +6192,7 @@
                   <a:schemeClr val="tx1"/>
                 </a:solidFill>
               </a:rPr>
-              <a:t>: </a:t>
+              <a:t>, bukan </a:t>
             </a:r>
             <a:r>
               <a:rPr lang="en-US" sz="1700" dirty="0">
@@ -6176,34 +6203,7 @@
                 <a:ea typeface="Consolas" pitchFamily="34" charset="-122"/>
                 <a:cs typeface="Consolas" pitchFamily="34" charset="-120"/>
               </a:rPr>
-              <a:t>++</a:t>
-            </a:r>
-            <a:r>
-              <a:rPr lang="en-US" sz="1700" dirty="0">
-                <a:solidFill>
-                  <a:schemeClr val="tx1"/>
-                </a:solidFill>
-              </a:rPr>
-              <a:t> pada </a:t>
-            </a:r>
-            <a:r>
-              <a:rPr lang="en-US" sz="1700" dirty="0">
-                <a:solidFill>
-                  <a:srgbClr val="A35F14"/>
-                </a:solidFill>
-                <a:latin typeface="Consolas" pitchFamily="34" charset="0"/>
-                <a:ea typeface="Consolas" pitchFamily="34" charset="-122"/>
-                <a:cs typeface="Consolas" pitchFamily="34" charset="-120"/>
-              </a:rPr>
-              <a:t>volatile</a:t>
-            </a:r>
-            <a:r>
-              <a:rPr lang="en-US" sz="1700" dirty="0">
-                <a:solidFill>
-                  <a:schemeClr val="tx1"/>
-                </a:solidFill>
-              </a:rPr>
-              <a:t> usang di C++ baru</a:t>
+              <a:t>x++</a:t>
             </a:r>
             <a:endParaRPr lang="en-US" sz="1700" dirty="0"/>
           </a:p>
@@ -9979,7 +9979,7 @@
                   <a:schemeClr val="tx1"/>
                 </a:solidFill>
               </a:rPr>
-              <a:t>API 2.x (</a:t>
+              <a:t>Contoh lama di internet (</a:t>
             </a:r>
             <a:r>
               <a:rPr lang="en-US" sz="1700" dirty="0">
@@ -9998,7 +9998,7 @@
                   <a:schemeClr val="tx1"/>
                 </a:solidFill>
               </a:rPr>
-              <a:t>) tidak berlaku</a:t>
+              <a:t>, core 2.x) tidak berlaku lagi</a:t>
             </a:r>
             <a:endParaRPr lang="en-US" sz="1700" dirty="0"/>
           </a:p>
